--- a/docs/links-26/presentations/Closing-Time-for-colleagues.pptx
+++ b/docs/links-26/presentations/Closing-Time-for-colleagues.pptx
@@ -692,7 +692,7 @@
           <a:p>
             <a:r>
               <a:rPr lang="en-US" dirty="0"/>
-              <a:t>Leave is only needed on working days Monday to Saturday; rest days and Sundays cost nothing. Today there is one unusual stretch of the roster where 14 days buys 30 days off — Closing Time spreads rest days more evenly, so its best is 28. On average it is the same, 23.4 days, and at its worst it is a day better than today. Four full weeks off (Sunday to Saturday) takes at least 15 days of leave, instead of 14 at best today. Say the four-weeks figure plainly: Closing Time is worse than today here, as all three shortlisted links are (Long Break, the leave-first design in the pack, keeps the 14), and people plan a year around it. The averages depend on where you count a booking as starting, so quote those as “about the same”.</a:t>
+              <a:t>Leave is only needed on working days Monday to Saturday; rest days and Sundays cost nothing. Today there is one unusual stretch of the roster where 14 days buys 30 days off — Closing Time spreads rest days more evenly, so its best is 28. On average it is the same, 23.4 days, and at its worst it is a day better than today. Four full weeks off (Sunday to Saturday) takes at least 15 days of leave, instead of 14 at best today. Say the four-weeks figure plainly: all four shortlisted links are worse than today here (Long Break, the leave-first design in the pack, keeps the 14), and people plan a year around it. The averages depend on where you count a booking as starting, so quote those as “about the same”.</a:t>
             </a:r>
             <a:endParaRPr lang="en-US" dirty="0"/>
           </a:p>

--- a/docs/links-26/presentations/Closing-Time-for-colleagues.pptx
+++ b/docs/links-26/presentations/Closing-Time-for-colleagues.pptx
@@ -3499,7 +3499,7 @@
                 <a:ea typeface="Inter" pitchFamily="34" charset="-122"/>
                 <a:cs typeface="Inter" pitchFamily="34" charset="-120"/>
               </a:rPr>
-              <a:t>More people rostered every day, at the open and the close</a:t>
+              <a:t>More people rostered every day, and more at the open and the close on most days</a:t>
             </a:r>
             <a:endParaRPr lang="en-US" sz="1500" dirty="0"/>
           </a:p>
@@ -4683,7 +4683,7 @@
                 <a:ea typeface="Inter" pitchFamily="34" charset="-122"/>
                 <a:cs typeface="Inter" pitchFamily="34" charset="-120"/>
               </a:rPr>
-              <a:t>Best 14-day stretch 28 days, not 30; average as today, worst a day better.</a:t>
+              <a:t>The least leave for four complete weeks off, Sunday to Saturday.</a:t>
             </a:r>
             <a:endParaRPr lang="en-US" sz="1250" dirty="0"/>
           </a:p>
